--- a/Presentation_Assignment2.pptx
+++ b/Presentation_Assignment2.pptx
@@ -107,15 +107,12 @@
       </a:defRPr>
     </a:lvl9pPr>
   </p:defaultTextStyle>
+  <p:extLst>
+    <p:ext uri="{EFAFB233-063F-42B5-8137-9DF3F51BA10A}">
+      <p15:sldGuideLst xmlns:p15="http://schemas.microsoft.com/office/powerpoint/2012/main"/>
+    </p:ext>
+  </p:extLst>
 </p:presentation>
-</file>
-
-<file path=ppt/revisionInfo.xml><?xml version="1.0" encoding="utf-8"?>
-<p1510:revInfo xmlns:a="http://schemas.openxmlformats.org/drawingml/2006/main" xmlns:r="http://schemas.openxmlformats.org/officeDocument/2006/relationships" xmlns:p1510="http://schemas.microsoft.com/office/powerpoint/2015/10/main">
-  <p1510:revLst>
-    <p1510:client id="{8374C1BF-11DB-43A2-A663-5EE3E4F08865}" v="89" dt="2026-09-12T00:09:29.759"/>
-  </p1510:revLst>
-</p1510:revInfo>
 </file>
 
 <file path=ppt/changesInfos/changesInfo1.xml><?xml version="1.0" encoding="utf-8"?>
@@ -123,12 +120,12 @@
   <pc:docChgLst>
     <pc:chgData name="Charity Gwese" userId="47cf6ea682a7bfa1" providerId="LiveId" clId="{E7309B3C-0CC5-4A93-AA0F-CE276BF7C62E}"/>
     <pc:docChg chg="undo custSel addSld modSld sldOrd">
-      <pc:chgData name="Charity Gwese" userId="47cf6ea682a7bfa1" providerId="LiveId" clId="{E7309B3C-0CC5-4A93-AA0F-CE276BF7C62E}" dt="2026-09-12T00:13:27.023" v="634" actId="207"/>
+      <pc:chgData name="Charity Gwese" userId="47cf6ea682a7bfa1" providerId="LiveId" clId="{E7309B3C-0CC5-4A93-AA0F-CE276BF7C62E}" dt="2026-10-02T13:00:31.469" v="635" actId="1076"/>
       <pc:docMkLst>
         <pc:docMk/>
       </pc:docMkLst>
       <pc:sldChg chg="addSp delSp modSp new mod ord modClrScheme chgLayout">
-        <pc:chgData name="Charity Gwese" userId="47cf6ea682a7bfa1" providerId="LiveId" clId="{E7309B3C-0CC5-4A93-AA0F-CE276BF7C62E}" dt="2026-09-12T00:10:48.935" v="626"/>
+        <pc:chgData name="Charity Gwese" userId="47cf6ea682a7bfa1" providerId="LiveId" clId="{E7309B3C-0CC5-4A93-AA0F-CE276BF7C62E}" dt="2026-10-02T13:00:31.469" v="635" actId="1076"/>
         <pc:sldMkLst>
           <pc:docMk/>
           <pc:sldMk cId="3337789029" sldId="256"/>
@@ -139,38 +136,6 @@
             <pc:docMk/>
             <pc:sldMk cId="3337789029" sldId="256"/>
             <ac:spMk id="2" creationId="{2A419528-92C5-1B1D-810E-5F199FA9E2CF}"/>
-          </ac:spMkLst>
-        </pc:spChg>
-        <pc:spChg chg="del">
-          <ac:chgData name="Charity Gwese" userId="47cf6ea682a7bfa1" providerId="LiveId" clId="{E7309B3C-0CC5-4A93-AA0F-CE276BF7C62E}" dt="2026-09-11T23:06:29.257" v="43" actId="34307"/>
-          <ac:spMkLst>
-            <pc:docMk/>
-            <pc:sldMk cId="3337789029" sldId="256"/>
-            <ac:spMk id="3" creationId="{723E8470-E10D-42A1-C58C-2C41DE62BF0D}"/>
-          </ac:spMkLst>
-        </pc:spChg>
-        <pc:spChg chg="add del mod">
-          <ac:chgData name="Charity Gwese" userId="47cf6ea682a7bfa1" providerId="LiveId" clId="{E7309B3C-0CC5-4A93-AA0F-CE276BF7C62E}" dt="2026-09-11T23:07:06.933" v="46" actId="700"/>
-          <ac:spMkLst>
-            <pc:docMk/>
-            <pc:sldMk cId="3337789029" sldId="256"/>
-            <ac:spMk id="6" creationId="{2AE721EA-A9A1-8490-0C87-FF4A09F487E3}"/>
-          </ac:spMkLst>
-        </pc:spChg>
-        <pc:spChg chg="add del mod">
-          <ac:chgData name="Charity Gwese" userId="47cf6ea682a7bfa1" providerId="LiveId" clId="{E7309B3C-0CC5-4A93-AA0F-CE276BF7C62E}" dt="2026-09-11T23:07:08.118" v="48"/>
-          <ac:spMkLst>
-            <pc:docMk/>
-            <pc:sldMk cId="3337789029" sldId="256"/>
-            <ac:spMk id="7" creationId="{73FA7269-4443-77BF-8CB3-6DD770FD47DE}"/>
-          </ac:spMkLst>
-        </pc:spChg>
-        <pc:spChg chg="add del mod">
-          <ac:chgData name="Charity Gwese" userId="47cf6ea682a7bfa1" providerId="LiveId" clId="{E7309B3C-0CC5-4A93-AA0F-CE276BF7C62E}" dt="2026-09-11T23:07:26.835" v="51"/>
-          <ac:spMkLst>
-            <pc:docMk/>
-            <pc:sldMk cId="3337789029" sldId="256"/>
-            <ac:spMk id="8" creationId="{F8BD1770-106E-6202-298C-B53D4CB27013}"/>
           </ac:spMkLst>
         </pc:spChg>
         <pc:spChg chg="add mod">
@@ -203,54 +168,6 @@
             <pc:docMk/>
             <pc:sldMk cId="3337789029" sldId="256"/>
             <ac:spMk id="14" creationId="{4AC87B1D-D030-F909-8122-B0D5E5AE28C3}"/>
-          </ac:spMkLst>
-        </pc:spChg>
-        <pc:spChg chg="add del mod">
-          <ac:chgData name="Charity Gwese" userId="47cf6ea682a7bfa1" providerId="LiveId" clId="{E7309B3C-0CC5-4A93-AA0F-CE276BF7C62E}" dt="2026-09-11T23:14:19.205" v="88" actId="21"/>
-          <ac:spMkLst>
-            <pc:docMk/>
-            <pc:sldMk cId="3337789029" sldId="256"/>
-            <ac:spMk id="15" creationId="{5D1F9445-D278-DFD6-CD9D-FDAD1E56F742}"/>
-          </ac:spMkLst>
-        </pc:spChg>
-        <pc:spChg chg="add del mod">
-          <ac:chgData name="Charity Gwese" userId="47cf6ea682a7bfa1" providerId="LiveId" clId="{E7309B3C-0CC5-4A93-AA0F-CE276BF7C62E}" dt="2026-09-11T23:14:21.257" v="89" actId="21"/>
-          <ac:spMkLst>
-            <pc:docMk/>
-            <pc:sldMk cId="3337789029" sldId="256"/>
-            <ac:spMk id="16" creationId="{B402E2FF-ED8F-D1DB-3EDF-B06915241148}"/>
-          </ac:spMkLst>
-        </pc:spChg>
-        <pc:spChg chg="add del mod">
-          <ac:chgData name="Charity Gwese" userId="47cf6ea682a7bfa1" providerId="LiveId" clId="{E7309B3C-0CC5-4A93-AA0F-CE276BF7C62E}" dt="2026-09-11T23:14:23.434" v="90" actId="21"/>
-          <ac:spMkLst>
-            <pc:docMk/>
-            <pc:sldMk cId="3337789029" sldId="256"/>
-            <ac:spMk id="17" creationId="{57BE9714-9B94-D328-2372-C363017B3A5D}"/>
-          </ac:spMkLst>
-        </pc:spChg>
-        <pc:spChg chg="add del mod">
-          <ac:chgData name="Charity Gwese" userId="47cf6ea682a7bfa1" providerId="LiveId" clId="{E7309B3C-0CC5-4A93-AA0F-CE276BF7C62E}" dt="2026-09-11T23:16:11.981" v="103" actId="21"/>
-          <ac:spMkLst>
-            <pc:docMk/>
-            <pc:sldMk cId="3337789029" sldId="256"/>
-            <ac:spMk id="18" creationId="{4E693B2B-BA19-3AB5-4267-267638ADEB6D}"/>
-          </ac:spMkLst>
-        </pc:spChg>
-        <pc:spChg chg="add del mod">
-          <ac:chgData name="Charity Gwese" userId="47cf6ea682a7bfa1" providerId="LiveId" clId="{E7309B3C-0CC5-4A93-AA0F-CE276BF7C62E}" dt="2026-09-11T23:16:13.937" v="104" actId="21"/>
-          <ac:spMkLst>
-            <pc:docMk/>
-            <pc:sldMk cId="3337789029" sldId="256"/>
-            <ac:spMk id="19" creationId="{B947ECC7-5927-4CEB-C54E-BBF67D54309E}"/>
-          </ac:spMkLst>
-        </pc:spChg>
-        <pc:spChg chg="add del mod">
-          <ac:chgData name="Charity Gwese" userId="47cf6ea682a7bfa1" providerId="LiveId" clId="{E7309B3C-0CC5-4A93-AA0F-CE276BF7C62E}" dt="2026-09-11T23:16:16.401" v="105" actId="21"/>
-          <ac:spMkLst>
-            <pc:docMk/>
-            <pc:sldMk cId="3337789029" sldId="256"/>
-            <ac:spMk id="20" creationId="{8B3F9FA1-0696-FD4A-0565-54364DB9F586}"/>
           </ac:spMkLst>
         </pc:spChg>
         <pc:spChg chg="add mod">
@@ -309,14 +226,6 @@
             <ac:spMk id="33" creationId="{518789BA-1176-240F-0041-A0B5DE90EF39}"/>
           </ac:spMkLst>
         </pc:spChg>
-        <pc:spChg chg="add del mod">
-          <ac:chgData name="Charity Gwese" userId="47cf6ea682a7bfa1" providerId="LiveId" clId="{E7309B3C-0CC5-4A93-AA0F-CE276BF7C62E}" dt="2026-09-11T23:24:58.574" v="152"/>
-          <ac:spMkLst>
-            <pc:docMk/>
-            <pc:sldMk cId="3337789029" sldId="256"/>
-            <ac:spMk id="34" creationId="{81CAE4A3-9AD5-F499-0F4D-226718A72CE3}"/>
-          </ac:spMkLst>
-        </pc:spChg>
         <pc:spChg chg="add mod">
           <ac:chgData name="Charity Gwese" userId="47cf6ea682a7bfa1" providerId="LiveId" clId="{E7309B3C-0CC5-4A93-AA0F-CE276BF7C62E}" dt="2026-09-11T23:36:43.912" v="232" actId="1076"/>
           <ac:spMkLst>
@@ -350,7 +259,7 @@
           </ac:spMkLst>
         </pc:spChg>
         <pc:spChg chg="add mod">
-          <ac:chgData name="Charity Gwese" userId="47cf6ea682a7bfa1" providerId="LiveId" clId="{E7309B3C-0CC5-4A93-AA0F-CE276BF7C62E}" dt="2026-09-11T23:37:24.245" v="240" actId="1076"/>
+          <ac:chgData name="Charity Gwese" userId="47cf6ea682a7bfa1" providerId="LiveId" clId="{E7309B3C-0CC5-4A93-AA0F-CE276BF7C62E}" dt="2026-10-02T13:00:31.469" v="635" actId="1076"/>
           <ac:spMkLst>
             <pc:docMk/>
             <pc:sldMk cId="3337789029" sldId="256"/>
@@ -365,54 +274,6 @@
             <ac:spMk id="40" creationId="{F511BE41-DB44-D3B1-0D6D-CAF7D7A3BCBD}"/>
           </ac:spMkLst>
         </pc:spChg>
-        <pc:spChg chg="add del mod ord">
-          <ac:chgData name="Charity Gwese" userId="47cf6ea682a7bfa1" providerId="LiveId" clId="{E7309B3C-0CC5-4A93-AA0F-CE276BF7C62E}" dt="2026-09-11T23:39:09.620" v="244" actId="700"/>
-          <ac:spMkLst>
-            <pc:docMk/>
-            <pc:sldMk cId="3337789029" sldId="256"/>
-            <ac:spMk id="41" creationId="{B7FED674-C6D3-97C3-019C-4B37CF220387}"/>
-          </ac:spMkLst>
-        </pc:spChg>
-        <pc:spChg chg="add del mod ord">
-          <ac:chgData name="Charity Gwese" userId="47cf6ea682a7bfa1" providerId="LiveId" clId="{E7309B3C-0CC5-4A93-AA0F-CE276BF7C62E}" dt="2026-09-11T23:39:09.620" v="244" actId="700"/>
-          <ac:spMkLst>
-            <pc:docMk/>
-            <pc:sldMk cId="3337789029" sldId="256"/>
-            <ac:spMk id="42" creationId="{A927EEFC-199D-39AE-6CC1-8A8A04D4A997}"/>
-          </ac:spMkLst>
-        </pc:spChg>
-        <pc:picChg chg="add del mod ord">
-          <ac:chgData name="Charity Gwese" userId="47cf6ea682a7bfa1" providerId="LiveId" clId="{E7309B3C-0CC5-4A93-AA0F-CE276BF7C62E}" dt="2026-09-11T23:06:35.478" v="44" actId="21"/>
-          <ac:picMkLst>
-            <pc:docMk/>
-            <pc:sldMk cId="3337789029" sldId="256"/>
-            <ac:picMk id="4" creationId="{F74EC3E7-51E6-67AF-CA34-C6A4A63BF6BD}"/>
-          </ac:picMkLst>
-        </pc:picChg>
-        <pc:picChg chg="add del mod">
-          <ac:chgData name="Charity Gwese" userId="47cf6ea682a7bfa1" providerId="LiveId" clId="{E7309B3C-0CC5-4A93-AA0F-CE276BF7C62E}" dt="2026-09-11T23:24:58.564" v="150" actId="21"/>
-          <ac:picMkLst>
-            <pc:docMk/>
-            <pc:sldMk cId="3337789029" sldId="256"/>
-            <ac:picMk id="28" creationId="{9DC1E339-938C-B125-BDFA-7B6960BCAE0F}"/>
-          </ac:picMkLst>
-        </pc:picChg>
-        <pc:picChg chg="add del mod">
-          <ac:chgData name="Charity Gwese" userId="47cf6ea682a7bfa1" providerId="LiveId" clId="{E7309B3C-0CC5-4A93-AA0F-CE276BF7C62E}" dt="2026-09-11T23:22:52.932" v="142" actId="22"/>
-          <ac:picMkLst>
-            <pc:docMk/>
-            <pc:sldMk cId="3337789029" sldId="256"/>
-            <ac:picMk id="30" creationId="{DC28537C-A418-5E3F-CBFD-7B390BAEC608}"/>
-          </ac:picMkLst>
-        </pc:picChg>
-        <pc:picChg chg="add del mod">
-          <ac:chgData name="Charity Gwese" userId="47cf6ea682a7bfa1" providerId="LiveId" clId="{E7309B3C-0CC5-4A93-AA0F-CE276BF7C62E}" dt="2026-09-11T23:22:48.786" v="139" actId="22"/>
-          <ac:picMkLst>
-            <pc:docMk/>
-            <pc:sldMk cId="3337789029" sldId="256"/>
-            <ac:picMk id="32" creationId="{E58F4C33-0613-D31F-3434-725BC51DB9D3}"/>
-          </ac:picMkLst>
-        </pc:picChg>
       </pc:sldChg>
       <pc:sldChg chg="addSp delSp modSp new mod modClrScheme chgLayout">
         <pc:chgData name="Charity Gwese" userId="47cf6ea682a7bfa1" providerId="LiveId" clId="{E7309B3C-0CC5-4A93-AA0F-CE276BF7C62E}" dt="2026-09-11T23:53:54.127" v="300" actId="5793"/>
@@ -420,30 +281,6 @@
           <pc:docMk/>
           <pc:sldMk cId="1865661211" sldId="257"/>
         </pc:sldMkLst>
-        <pc:spChg chg="del mod ord">
-          <ac:chgData name="Charity Gwese" userId="47cf6ea682a7bfa1" providerId="LiveId" clId="{E7309B3C-0CC5-4A93-AA0F-CE276BF7C62E}" dt="2026-09-11T23:39:35.205" v="246" actId="700"/>
-          <ac:spMkLst>
-            <pc:docMk/>
-            <pc:sldMk cId="1865661211" sldId="257"/>
-            <ac:spMk id="2" creationId="{75BBA52C-FF9D-C071-D8AE-E5BF2693B563}"/>
-          </ac:spMkLst>
-        </pc:spChg>
-        <pc:spChg chg="del mod ord">
-          <ac:chgData name="Charity Gwese" userId="47cf6ea682a7bfa1" providerId="LiveId" clId="{E7309B3C-0CC5-4A93-AA0F-CE276BF7C62E}" dt="2026-09-11T23:39:35.205" v="246" actId="700"/>
-          <ac:spMkLst>
-            <pc:docMk/>
-            <pc:sldMk cId="1865661211" sldId="257"/>
-            <ac:spMk id="3" creationId="{B6EA5323-AFDE-007C-D6D5-79AAE651A38C}"/>
-          </ac:spMkLst>
-        </pc:spChg>
-        <pc:spChg chg="del mod ord">
-          <ac:chgData name="Charity Gwese" userId="47cf6ea682a7bfa1" providerId="LiveId" clId="{E7309B3C-0CC5-4A93-AA0F-CE276BF7C62E}" dt="2026-09-11T23:39:35.205" v="246" actId="700"/>
-          <ac:spMkLst>
-            <pc:docMk/>
-            <pc:sldMk cId="1865661211" sldId="257"/>
-            <ac:spMk id="4" creationId="{8A93614D-FE41-1311-55A2-6F6D43116FCD}"/>
-          </ac:spMkLst>
-        </pc:spChg>
         <pc:spChg chg="add mod ord">
           <ac:chgData name="Charity Gwese" userId="47cf6ea682a7bfa1" providerId="LiveId" clId="{E7309B3C-0CC5-4A93-AA0F-CE276BF7C62E}" dt="2026-09-11T23:48:03.856" v="267" actId="27636"/>
           <ac:spMkLst>
@@ -460,36 +297,12 @@
             <ac:spMk id="6" creationId="{772798F5-9DB6-171C-EC7E-B018F3892029}"/>
           </ac:spMkLst>
         </pc:spChg>
-        <pc:spChg chg="add del mod ord">
-          <ac:chgData name="Charity Gwese" userId="47cf6ea682a7bfa1" providerId="LiveId" clId="{E7309B3C-0CC5-4A93-AA0F-CE276BF7C62E}" dt="2026-09-11T23:48:47.640" v="270" actId="22"/>
-          <ac:spMkLst>
-            <pc:docMk/>
-            <pc:sldMk cId="1865661211" sldId="257"/>
-            <ac:spMk id="7" creationId="{7C703428-D3FB-9A35-3DDB-01973D3CBF31}"/>
-          </ac:spMkLst>
-        </pc:spChg>
-        <pc:spChg chg="add del mod">
-          <ac:chgData name="Charity Gwese" userId="47cf6ea682a7bfa1" providerId="LiveId" clId="{E7309B3C-0CC5-4A93-AA0F-CE276BF7C62E}" dt="2026-09-11T23:48:08.065" v="269"/>
-          <ac:spMkLst>
-            <pc:docMk/>
-            <pc:sldMk cId="1865661211" sldId="257"/>
-            <ac:spMk id="8" creationId="{4586F74C-58F7-2FF8-DDB2-09716FAE0D32}"/>
-          </ac:spMkLst>
-        </pc:spChg>
         <pc:spChg chg="add mod">
           <ac:chgData name="Charity Gwese" userId="47cf6ea682a7bfa1" providerId="LiveId" clId="{E7309B3C-0CC5-4A93-AA0F-CE276BF7C62E}" dt="2026-09-11T23:47:11.195" v="261" actId="207"/>
           <ac:spMkLst>
             <pc:docMk/>
             <pc:sldMk cId="1865661211" sldId="257"/>
             <ac:spMk id="10" creationId="{24B799CC-1332-66F5-C081-BB97DC2AB886}"/>
-          </ac:spMkLst>
-        </pc:spChg>
-        <pc:spChg chg="add del">
-          <ac:chgData name="Charity Gwese" userId="47cf6ea682a7bfa1" providerId="LiveId" clId="{E7309B3C-0CC5-4A93-AA0F-CE276BF7C62E}" dt="2026-09-11T23:46:25.032" v="258" actId="22"/>
-          <ac:spMkLst>
-            <pc:docMk/>
-            <pc:sldMk cId="1865661211" sldId="257"/>
-            <ac:spMk id="12" creationId="{24EA4C88-D2A4-864C-862E-1FF744883167}"/>
           </ac:spMkLst>
         </pc:spChg>
         <pc:spChg chg="add mod">
@@ -580,14 +393,6 @@
           </ac:spMkLst>
         </pc:spChg>
         <pc:spChg chg="add mod">
-          <ac:chgData name="Charity Gwese" userId="47cf6ea682a7bfa1" providerId="LiveId" clId="{E7309B3C-0CC5-4A93-AA0F-CE276BF7C62E}" dt="2026-09-11T23:58:57.032" v="325"/>
-          <ac:spMkLst>
-            <pc:docMk/>
-            <pc:sldMk cId="3537886712" sldId="258"/>
-            <ac:spMk id="9" creationId="{F141F635-78B2-B181-9928-414857DE62F9}"/>
-          </ac:spMkLst>
-        </pc:spChg>
-        <pc:spChg chg="add mod">
           <ac:chgData name="Charity Gwese" userId="47cf6ea682a7bfa1" providerId="LiveId" clId="{E7309B3C-0CC5-4A93-AA0F-CE276BF7C62E}" dt="2026-09-12T00:00:35.200" v="332" actId="1076"/>
           <ac:spMkLst>
             <pc:docMk/>
@@ -619,14 +424,6 @@
             <ac:spMk id="15" creationId="{003CB6C7-9232-B7B3-CC9A-7DED3272A84D}"/>
           </ac:spMkLst>
         </pc:spChg>
-        <pc:picChg chg="add del mod">
-          <ac:chgData name="Charity Gwese" userId="47cf6ea682a7bfa1" providerId="LiveId" clId="{E7309B3C-0CC5-4A93-AA0F-CE276BF7C62E}" dt="2026-09-11T23:59:47.766" v="329" actId="21"/>
-          <ac:picMkLst>
-            <pc:docMk/>
-            <pc:sldMk cId="3537886712" sldId="258"/>
-            <ac:picMk id="11" creationId="{0B5B778F-79D6-D337-1E7A-532354736D3D}"/>
-          </ac:picMkLst>
-        </pc:picChg>
       </pc:sldChg>
       <pc:sldChg chg="addSp delSp modSp new mod modClrScheme chgLayout">
         <pc:chgData name="Charity Gwese" userId="47cf6ea682a7bfa1" providerId="LiveId" clId="{E7309B3C-0CC5-4A93-AA0F-CE276BF7C62E}" dt="2026-09-12T00:13:27.023" v="634" actId="207"/>
@@ -634,14 +431,6 @@
           <pc:docMk/>
           <pc:sldMk cId="3405442006" sldId="259"/>
         </pc:sldMkLst>
-        <pc:spChg chg="del">
-          <ac:chgData name="Charity Gwese" userId="47cf6ea682a7bfa1" providerId="LiveId" clId="{E7309B3C-0CC5-4A93-AA0F-CE276BF7C62E}" dt="2026-09-12T00:04:42.896" v="353" actId="700"/>
-          <ac:spMkLst>
-            <pc:docMk/>
-            <pc:sldMk cId="3405442006" sldId="259"/>
-            <ac:spMk id="2" creationId="{8E6A0A98-3B4A-3411-6504-488859BDA410}"/>
-          </ac:spMkLst>
-        </pc:spChg>
         <pc:spChg chg="mod">
           <ac:chgData name="Charity Gwese" userId="47cf6ea682a7bfa1" providerId="LiveId" clId="{E7309B3C-0CC5-4A93-AA0F-CE276BF7C62E}" dt="2026-09-12T00:07:12.837" v="452" actId="21"/>
           <ac:spMkLst>
@@ -754,22 +543,6 @@
             <ac:spMk id="80" creationId="{CB4408B2-337B-B68D-DE3F-00B5EFD660ED}"/>
           </ac:spMkLst>
         </pc:spChg>
-        <pc:spChg chg="del">
-          <ac:chgData name="Charity Gwese" userId="47cf6ea682a7bfa1" providerId="LiveId" clId="{E7309B3C-0CC5-4A93-AA0F-CE276BF7C62E}" dt="2026-09-12T00:05:31.879" v="357" actId="21"/>
-          <ac:spMkLst>
-            <pc:docMk/>
-            <pc:sldMk cId="3405442006" sldId="259"/>
-            <ac:spMk id="82" creationId="{0FF1A879-5CE0-67D8-C281-D248CD8D3EFF}"/>
-          </ac:spMkLst>
-        </pc:spChg>
-        <pc:spChg chg="add del mod">
-          <ac:chgData name="Charity Gwese" userId="47cf6ea682a7bfa1" providerId="LiveId" clId="{E7309B3C-0CC5-4A93-AA0F-CE276BF7C62E}" dt="2026-09-12T00:09:17.384" v="572" actId="478"/>
-          <ac:spMkLst>
-            <pc:docMk/>
-            <pc:sldMk cId="3405442006" sldId="259"/>
-            <ac:spMk id="83" creationId="{0DD64C6C-A4FB-173F-B222-7AE5A38E2383}"/>
-          </ac:spMkLst>
-        </pc:spChg>
         <pc:spChg chg="add mod">
           <ac:chgData name="Charity Gwese" userId="47cf6ea682a7bfa1" providerId="LiveId" clId="{E7309B3C-0CC5-4A93-AA0F-CE276BF7C62E}" dt="2026-09-12T00:10:24.997" v="624" actId="255"/>
           <ac:spMkLst>
@@ -933,7 +706,7 @@
           <a:p>
             <a:fld id="{B1ECD068-E763-4D96-972C-0B3F1441A126}" type="datetimeFigureOut">
               <a:rPr lang="en-AU" smtClean="0"/>
-              <a:t>12/09/2026</a:t>
+              <a:t>2/10/2026</a:t>
             </a:fld>
             <a:endParaRPr lang="en-AU"/>
           </a:p>
@@ -1133,7 +906,7 @@
           <a:p>
             <a:fld id="{B1ECD068-E763-4D96-972C-0B3F1441A126}" type="datetimeFigureOut">
               <a:rPr lang="en-AU" smtClean="0"/>
-              <a:t>12/09/2026</a:t>
+              <a:t>2/10/2026</a:t>
             </a:fld>
             <a:endParaRPr lang="en-AU"/>
           </a:p>
@@ -1343,7 +1116,7 @@
           <a:p>
             <a:fld id="{B1ECD068-E763-4D96-972C-0B3F1441A126}" type="datetimeFigureOut">
               <a:rPr lang="en-AU" smtClean="0"/>
-              <a:t>12/09/2026</a:t>
+              <a:t>2/10/2026</a:t>
             </a:fld>
             <a:endParaRPr lang="en-AU"/>
           </a:p>
@@ -1543,7 +1316,7 @@
           <a:p>
             <a:fld id="{B1ECD068-E763-4D96-972C-0B3F1441A126}" type="datetimeFigureOut">
               <a:rPr lang="en-AU" smtClean="0"/>
-              <a:t>12/09/2026</a:t>
+              <a:t>2/10/2026</a:t>
             </a:fld>
             <a:endParaRPr lang="en-AU"/>
           </a:p>
@@ -1819,7 +1592,7 @@
           <a:p>
             <a:fld id="{B1ECD068-E763-4D96-972C-0B3F1441A126}" type="datetimeFigureOut">
               <a:rPr lang="en-AU" smtClean="0"/>
-              <a:t>12/09/2026</a:t>
+              <a:t>2/10/2026</a:t>
             </a:fld>
             <a:endParaRPr lang="en-AU"/>
           </a:p>
@@ -2087,7 +1860,7 @@
           <a:p>
             <a:fld id="{B1ECD068-E763-4D96-972C-0B3F1441A126}" type="datetimeFigureOut">
               <a:rPr lang="en-AU" smtClean="0"/>
-              <a:t>12/09/2026</a:t>
+              <a:t>2/10/2026</a:t>
             </a:fld>
             <a:endParaRPr lang="en-AU"/>
           </a:p>
@@ -2502,7 +2275,7 @@
           <a:p>
             <a:fld id="{B1ECD068-E763-4D96-972C-0B3F1441A126}" type="datetimeFigureOut">
               <a:rPr lang="en-AU" smtClean="0"/>
-              <a:t>12/09/2026</a:t>
+              <a:t>2/10/2026</a:t>
             </a:fld>
             <a:endParaRPr lang="en-AU"/>
           </a:p>
@@ -2644,7 +2417,7 @@
           <a:p>
             <a:fld id="{B1ECD068-E763-4D96-972C-0B3F1441A126}" type="datetimeFigureOut">
               <a:rPr lang="en-AU" smtClean="0"/>
-              <a:t>12/09/2026</a:t>
+              <a:t>2/10/2026</a:t>
             </a:fld>
             <a:endParaRPr lang="en-AU"/>
           </a:p>
@@ -2757,7 +2530,7 @@
           <a:p>
             <a:fld id="{B1ECD068-E763-4D96-972C-0B3F1441A126}" type="datetimeFigureOut">
               <a:rPr lang="en-AU" smtClean="0"/>
-              <a:t>12/09/2026</a:t>
+              <a:t>2/10/2026</a:t>
             </a:fld>
             <a:endParaRPr lang="en-AU"/>
           </a:p>
@@ -3070,7 +2843,7 @@
           <a:p>
             <a:fld id="{B1ECD068-E763-4D96-972C-0B3F1441A126}" type="datetimeFigureOut">
               <a:rPr lang="en-AU" smtClean="0"/>
-              <a:t>12/09/2026</a:t>
+              <a:t>2/10/2026</a:t>
             </a:fld>
             <a:endParaRPr lang="en-AU"/>
           </a:p>
@@ -3359,7 +3132,7 @@
           <a:p>
             <a:fld id="{B1ECD068-E763-4D96-972C-0B3F1441A126}" type="datetimeFigureOut">
               <a:rPr lang="en-AU" smtClean="0"/>
-              <a:t>12/09/2026</a:t>
+              <a:t>2/10/2026</a:t>
             </a:fld>
             <a:endParaRPr lang="en-AU"/>
           </a:p>
@@ -3602,7 +3375,7 @@
           <a:p>
             <a:fld id="{B1ECD068-E763-4D96-972C-0B3F1441A126}" type="datetimeFigureOut">
               <a:rPr lang="en-AU" smtClean="0"/>
-              <a:t>12/09/2026</a:t>
+              <a:t>2/10/2026</a:t>
             </a:fld>
             <a:endParaRPr lang="en-AU"/>
           </a:p>
@@ -5495,7 +5268,7 @@
         </p:nvSpPr>
         <p:spPr>
           <a:xfrm>
-            <a:off x="9160872" y="3487007"/>
+            <a:off x="9160872" y="3540347"/>
             <a:ext cx="2791322" cy="1473480"/>
           </a:xfrm>
           <a:prstGeom prst="rect">
